--- a/docs/paper/diagram-sources-2026-09-16/figS4_metal_prices.pptx
+++ b/docs/paper/diagram-sources-2026-09-16/figS4_metal_prices.pptx
@@ -3625,7 +3625,7 @@
       </p:sp>
       <p:pic>
         <p:nvPicPr>
-          <p:cNvPr id="3" name="panel-a-image" descr="figS1_metal_prices.a.png"/>
+          <p:cNvPr id="3" name="panel-a-image" descr="figS4_metal_prices.a.png"/>
           <p:cNvPicPr>
             <a:picLocks noChangeAspect="1"/>
           </p:cNvPicPr>
@@ -3649,7 +3649,7 @@
       </p:pic>
       <p:pic>
         <p:nvPicPr>
-          <p:cNvPr id="4" name="panel-b-image" descr="figS1_metal_prices.b.png"/>
+          <p:cNvPr id="4" name="panel-b-image" descr="figS4_metal_prices.b.png"/>
           <p:cNvPicPr>
             <a:picLocks noChangeAspect="1"/>
           </p:cNvPicPr>
@@ -3805,7 +3805,7 @@
       </p:sp>
       <p:pic>
         <p:nvPicPr>
-          <p:cNvPr id="3" name="panel-a-image" descr="figS1_metal_prices.a.ko.png"/>
+          <p:cNvPr id="3" name="panel-a-image" descr="figS4_metal_prices.a.ko.png"/>
           <p:cNvPicPr>
             <a:picLocks noChangeAspect="1"/>
           </p:cNvPicPr>
@@ -3829,7 +3829,7 @@
       </p:pic>
       <p:pic>
         <p:nvPicPr>
-          <p:cNvPr id="4" name="panel-b-image" descr="figS1_metal_prices.b.ko.png"/>
+          <p:cNvPr id="4" name="panel-b-image" descr="figS4_metal_prices.b.ko.png"/>
           <p:cNvPicPr>
             <a:picLocks noChangeAspect="1"/>
           </p:cNvPicPr>
